--- a/K09_Sidang_Proposal_DeteksiPedestrianLowLight.pptx
+++ b/K09_Sidang_Proposal_DeteksiPedestrianLowLight.pptx
@@ -5,19 +5,19 @@
     <p:sldMasterId id="2147483648" r:id="rId1"/>
   </p:sldMasterIdLst>
   <p:sldIdLst>
-    <p:sldId id="256" r:id="rId2"/>
-    <p:sldId id="257" r:id="rId3"/>
-    <p:sldId id="258" r:id="rId4"/>
-    <p:sldId id="259" r:id="rId5"/>
-    <p:sldId id="260" r:id="rId6"/>
-    <p:sldId id="261" r:id="rId7"/>
-    <p:sldId id="262" r:id="rId8"/>
-    <p:sldId id="263" r:id="rId9"/>
-    <p:sldId id="264" r:id="rId10"/>
-    <p:sldId id="265" r:id="rId11"/>
-    <p:sldId id="266" r:id="rId12"/>
+    <p:sldId id="256" r:id="rId7"/>
+    <p:sldId id="257" r:id="rId8"/>
+    <p:sldId id="258" r:id="rId9"/>
+    <p:sldId id="259" r:id="rId10"/>
+    <p:sldId id="260" r:id="rId11"/>
+    <p:sldId id="261" r:id="rId12"/>
+    <p:sldId id="262" r:id="rId13"/>
+    <p:sldId id="263" r:id="rId14"/>
+    <p:sldId id="264" r:id="rId15"/>
+    <p:sldId id="265" r:id="rId16"/>
+    <p:sldId id="266" r:id="rId17"/>
   </p:sldIdLst>
-  <p:sldSz cx="12192000" cy="6858000"/>
+  <p:sldSz cx="12191695" cy="6858000" type="screen4x3"/>
   <p:notesSz cx="6858000" cy="9144000"/>
   <p:defaultTextStyle>
     <a:defPPr>
@@ -114,22 +114,6 @@
       </a:defRPr>
     </a:lvl9pPr>
   </p:defaultTextStyle>
-  <p:extLst>
-    <p:ext uri="{EFAFB233-063F-42B5-8137-9DF3F51BA10A}">
-      <p15:sldGuideLst xmlns:p15="http://schemas.microsoft.com/office/powerpoint/2012/main">
-        <p15:guide id="1" orient="horz" pos="2160">
-          <p15:clr>
-            <a:srgbClr val="A4A3A4"/>
-          </p15:clr>
-        </p15:guide>
-        <p15:guide id="2" pos="2880">
-          <p15:clr>
-            <a:srgbClr val="A4A3A4"/>
-          </p15:clr>
-        </p15:guide>
-      </p15:sldGuideLst>
-    </p:ext>
-  </p:extLst>
 </p:presentation>
 </file>
 
@@ -171,9 +155,10 @@
           <a:lstStyle/>
           <a:p>
             <a:r>
-              <a:rPr lang="en-US"/>
+              <a:rPr lang="en-US" smtClean="0"/>
               <a:t>Click to edit Master title style</a:t>
             </a:r>
+            <a:endParaRPr lang="en-US"/>
           </a:p>
         </p:txBody>
       </p:sp>
@@ -289,9 +274,10 @@
           </a:lstStyle>
           <a:p>
             <a:r>
-              <a:rPr lang="en-US"/>
+              <a:rPr lang="en-US" smtClean="0"/>
               <a:t>Click to edit Master subtitle style</a:t>
             </a:r>
+            <a:endParaRPr lang="en-US"/>
           </a:p>
         </p:txBody>
       </p:sp>
@@ -312,7 +298,7 @@
           <a:p>
             <a:fld id="{5BCAD085-E8A6-8845-BD4E-CB4CCA059FC4}" type="datetimeFigureOut">
               <a:rPr lang="en-US" smtClean="0"/>
-              <a:t>10/13/2026</a:t>
+              <a:t>1/27/13</a:t>
             </a:fld>
             <a:endParaRPr lang="en-US"/>
           </a:p>
@@ -406,9 +392,10 @@
           <a:lstStyle/>
           <a:p>
             <a:r>
-              <a:rPr lang="en-US"/>
+              <a:rPr lang="en-US" smtClean="0"/>
               <a:t>Click to edit Master title style</a:t>
             </a:r>
+            <a:endParaRPr lang="en-US"/>
           </a:p>
         </p:txBody>
       </p:sp>
@@ -429,37 +416,38 @@
           <a:p>
             <a:pPr lvl="0"/>
             <a:r>
-              <a:rPr lang="en-US"/>
+              <a:rPr lang="en-US" smtClean="0"/>
               <a:t>Click to edit Master text styles</a:t>
             </a:r>
           </a:p>
           <a:p>
             <a:pPr lvl="1"/>
             <a:r>
-              <a:rPr lang="en-US"/>
+              <a:rPr lang="en-US" smtClean="0"/>
               <a:t>Second level</a:t>
             </a:r>
           </a:p>
           <a:p>
             <a:pPr lvl="2"/>
             <a:r>
-              <a:rPr lang="en-US"/>
+              <a:rPr lang="en-US" smtClean="0"/>
               <a:t>Third level</a:t>
             </a:r>
           </a:p>
           <a:p>
             <a:pPr lvl="3"/>
             <a:r>
-              <a:rPr lang="en-US"/>
+              <a:rPr lang="en-US" smtClean="0"/>
               <a:t>Fourth level</a:t>
             </a:r>
           </a:p>
           <a:p>
             <a:pPr lvl="4"/>
             <a:r>
-              <a:rPr lang="en-US"/>
+              <a:rPr lang="en-US" smtClean="0"/>
               <a:t>Fifth level</a:t>
             </a:r>
+            <a:endParaRPr lang="en-US"/>
           </a:p>
         </p:txBody>
       </p:sp>
@@ -480,7 +468,7 @@
           <a:p>
             <a:fld id="{5BCAD085-E8A6-8845-BD4E-CB4CCA059FC4}" type="datetimeFigureOut">
               <a:rPr lang="en-US" smtClean="0"/>
-              <a:t>10/13/2026</a:t>
+              <a:t>1/27/13</a:t>
             </a:fld>
             <a:endParaRPr lang="en-US"/>
           </a:p>
@@ -579,9 +567,10 @@
           <a:lstStyle/>
           <a:p>
             <a:r>
-              <a:rPr lang="en-US"/>
+              <a:rPr lang="en-US" smtClean="0"/>
               <a:t>Click to edit Master title style</a:t>
             </a:r>
+            <a:endParaRPr lang="en-US"/>
           </a:p>
         </p:txBody>
       </p:sp>
@@ -607,37 +596,38 @@
           <a:p>
             <a:pPr lvl="0"/>
             <a:r>
-              <a:rPr lang="en-US"/>
+              <a:rPr lang="en-US" smtClean="0"/>
               <a:t>Click to edit Master text styles</a:t>
             </a:r>
           </a:p>
           <a:p>
             <a:pPr lvl="1"/>
             <a:r>
-              <a:rPr lang="en-US"/>
+              <a:rPr lang="en-US" smtClean="0"/>
               <a:t>Second level</a:t>
             </a:r>
           </a:p>
           <a:p>
             <a:pPr lvl="2"/>
             <a:r>
-              <a:rPr lang="en-US"/>
+              <a:rPr lang="en-US" smtClean="0"/>
               <a:t>Third level</a:t>
             </a:r>
           </a:p>
           <a:p>
             <a:pPr lvl="3"/>
             <a:r>
-              <a:rPr lang="en-US"/>
+              <a:rPr lang="en-US" smtClean="0"/>
               <a:t>Fourth level</a:t>
             </a:r>
           </a:p>
           <a:p>
             <a:pPr lvl="4"/>
             <a:r>
-              <a:rPr lang="en-US"/>
+              <a:rPr lang="en-US" smtClean="0"/>
               <a:t>Fifth level</a:t>
             </a:r>
+            <a:endParaRPr lang="en-US"/>
           </a:p>
         </p:txBody>
       </p:sp>
@@ -658,7 +648,7 @@
           <a:p>
             <a:fld id="{5BCAD085-E8A6-8845-BD4E-CB4CCA059FC4}" type="datetimeFigureOut">
               <a:rPr lang="en-US" smtClean="0"/>
-              <a:t>10/13/2026</a:t>
+              <a:t>1/27/13</a:t>
             </a:fld>
             <a:endParaRPr lang="en-US"/>
           </a:p>
@@ -752,9 +742,10 @@
           <a:lstStyle/>
           <a:p>
             <a:r>
-              <a:rPr lang="en-US"/>
+              <a:rPr lang="en-US" smtClean="0"/>
               <a:t>Click to edit Master title style</a:t>
             </a:r>
+            <a:endParaRPr lang="en-US"/>
           </a:p>
         </p:txBody>
       </p:sp>
@@ -775,37 +766,38 @@
           <a:p>
             <a:pPr lvl="0"/>
             <a:r>
-              <a:rPr lang="en-US"/>
+              <a:rPr lang="en-US" smtClean="0"/>
               <a:t>Click to edit Master text styles</a:t>
             </a:r>
           </a:p>
           <a:p>
             <a:pPr lvl="1"/>
             <a:r>
-              <a:rPr lang="en-US"/>
+              <a:rPr lang="en-US" smtClean="0"/>
               <a:t>Second level</a:t>
             </a:r>
           </a:p>
           <a:p>
             <a:pPr lvl="2"/>
             <a:r>
-              <a:rPr lang="en-US"/>
+              <a:rPr lang="en-US" smtClean="0"/>
               <a:t>Third level</a:t>
             </a:r>
           </a:p>
           <a:p>
             <a:pPr lvl="3"/>
             <a:r>
-              <a:rPr lang="en-US"/>
+              <a:rPr lang="en-US" smtClean="0"/>
               <a:t>Fourth level</a:t>
             </a:r>
           </a:p>
           <a:p>
             <a:pPr lvl="4"/>
             <a:r>
-              <a:rPr lang="en-US"/>
+              <a:rPr lang="en-US" smtClean="0"/>
               <a:t>Fifth level</a:t>
             </a:r>
+            <a:endParaRPr lang="en-US"/>
           </a:p>
         </p:txBody>
       </p:sp>
@@ -826,7 +818,7 @@
           <a:p>
             <a:fld id="{5BCAD085-E8A6-8845-BD4E-CB4CCA059FC4}" type="datetimeFigureOut">
               <a:rPr lang="en-US" smtClean="0"/>
-              <a:t>10/13/2026</a:t>
+              <a:t>1/27/13</a:t>
             </a:fld>
             <a:endParaRPr lang="en-US"/>
           </a:p>
@@ -929,9 +921,10 @@
           </a:lstStyle>
           <a:p>
             <a:r>
-              <a:rPr lang="en-US"/>
+              <a:rPr lang="en-US" smtClean="0"/>
               <a:t>Click to edit Master title style</a:t>
             </a:r>
+            <a:endParaRPr lang="en-US"/>
           </a:p>
         </p:txBody>
       </p:sp>
@@ -1048,7 +1041,7 @@
           <a:p>
             <a:pPr lvl="0"/>
             <a:r>
-              <a:rPr lang="en-US"/>
+              <a:rPr lang="en-US" smtClean="0"/>
               <a:t>Click to edit Master text styles</a:t>
             </a:r>
           </a:p>
@@ -1071,7 +1064,7 @@
           <a:p>
             <a:fld id="{5BCAD085-E8A6-8845-BD4E-CB4CCA059FC4}" type="datetimeFigureOut">
               <a:rPr lang="en-US" smtClean="0"/>
-              <a:t>10/13/2026</a:t>
+              <a:t>1/27/13</a:t>
             </a:fld>
             <a:endParaRPr lang="en-US"/>
           </a:p>
@@ -1165,9 +1158,10 @@
           <a:lstStyle/>
           <a:p>
             <a:r>
-              <a:rPr lang="en-US"/>
+              <a:rPr lang="en-US" smtClean="0"/>
               <a:t>Click to edit Master title style</a:t>
             </a:r>
+            <a:endParaRPr lang="en-US"/>
           </a:p>
         </p:txBody>
       </p:sp>
@@ -1221,37 +1215,38 @@
           <a:p>
             <a:pPr lvl="0"/>
             <a:r>
-              <a:rPr lang="en-US"/>
+              <a:rPr lang="en-US" smtClean="0"/>
               <a:t>Click to edit Master text styles</a:t>
             </a:r>
           </a:p>
           <a:p>
             <a:pPr lvl="1"/>
             <a:r>
-              <a:rPr lang="en-US"/>
+              <a:rPr lang="en-US" smtClean="0"/>
               <a:t>Second level</a:t>
             </a:r>
           </a:p>
           <a:p>
             <a:pPr lvl="2"/>
             <a:r>
-              <a:rPr lang="en-US"/>
+              <a:rPr lang="en-US" smtClean="0"/>
               <a:t>Third level</a:t>
             </a:r>
           </a:p>
           <a:p>
             <a:pPr lvl="3"/>
             <a:r>
-              <a:rPr lang="en-US"/>
+              <a:rPr lang="en-US" smtClean="0"/>
               <a:t>Fourth level</a:t>
             </a:r>
           </a:p>
           <a:p>
             <a:pPr lvl="4"/>
             <a:r>
-              <a:rPr lang="en-US"/>
+              <a:rPr lang="en-US" smtClean="0"/>
               <a:t>Fifth level</a:t>
             </a:r>
+            <a:endParaRPr lang="en-US"/>
           </a:p>
         </p:txBody>
       </p:sp>
@@ -1305,37 +1300,38 @@
           <a:p>
             <a:pPr lvl="0"/>
             <a:r>
-              <a:rPr lang="en-US"/>
+              <a:rPr lang="en-US" smtClean="0"/>
               <a:t>Click to edit Master text styles</a:t>
             </a:r>
           </a:p>
           <a:p>
             <a:pPr lvl="1"/>
             <a:r>
-              <a:rPr lang="en-US"/>
+              <a:rPr lang="en-US" smtClean="0"/>
               <a:t>Second level</a:t>
             </a:r>
           </a:p>
           <a:p>
             <a:pPr lvl="2"/>
             <a:r>
-              <a:rPr lang="en-US"/>
+              <a:rPr lang="en-US" smtClean="0"/>
               <a:t>Third level</a:t>
             </a:r>
           </a:p>
           <a:p>
             <a:pPr lvl="3"/>
             <a:r>
-              <a:rPr lang="en-US"/>
+              <a:rPr lang="en-US" smtClean="0"/>
               <a:t>Fourth level</a:t>
             </a:r>
           </a:p>
           <a:p>
             <a:pPr lvl="4"/>
             <a:r>
-              <a:rPr lang="en-US"/>
+              <a:rPr lang="en-US" smtClean="0"/>
               <a:t>Fifth level</a:t>
             </a:r>
+            <a:endParaRPr lang="en-US"/>
           </a:p>
         </p:txBody>
       </p:sp>
@@ -1356,7 +1352,7 @@
           <a:p>
             <a:fld id="{5BCAD085-E8A6-8845-BD4E-CB4CCA059FC4}" type="datetimeFigureOut">
               <a:rPr lang="en-US" smtClean="0"/>
-              <a:t>10/13/2026</a:t>
+              <a:t>1/27/13</a:t>
             </a:fld>
             <a:endParaRPr lang="en-US"/>
           </a:p>
@@ -1454,9 +1450,10 @@
           </a:lstStyle>
           <a:p>
             <a:r>
-              <a:rPr lang="en-US"/>
+              <a:rPr lang="en-US" smtClean="0"/>
               <a:t>Click to edit Master title style</a:t>
             </a:r>
+            <a:endParaRPr lang="en-US"/>
           </a:p>
         </p:txBody>
       </p:sp>
@@ -1519,7 +1516,7 @@
           <a:p>
             <a:pPr lvl="0"/>
             <a:r>
-              <a:rPr lang="en-US"/>
+              <a:rPr lang="en-US" smtClean="0"/>
               <a:t>Click to edit Master text styles</a:t>
             </a:r>
           </a:p>
@@ -1575,37 +1572,38 @@
           <a:p>
             <a:pPr lvl="0"/>
             <a:r>
-              <a:rPr lang="en-US"/>
+              <a:rPr lang="en-US" smtClean="0"/>
               <a:t>Click to edit Master text styles</a:t>
             </a:r>
           </a:p>
           <a:p>
             <a:pPr lvl="1"/>
             <a:r>
-              <a:rPr lang="en-US"/>
+              <a:rPr lang="en-US" smtClean="0"/>
               <a:t>Second level</a:t>
             </a:r>
           </a:p>
           <a:p>
             <a:pPr lvl="2"/>
             <a:r>
-              <a:rPr lang="en-US"/>
+              <a:rPr lang="en-US" smtClean="0"/>
               <a:t>Third level</a:t>
             </a:r>
           </a:p>
           <a:p>
             <a:pPr lvl="3"/>
             <a:r>
-              <a:rPr lang="en-US"/>
+              <a:rPr lang="en-US" smtClean="0"/>
               <a:t>Fourth level</a:t>
             </a:r>
           </a:p>
           <a:p>
             <a:pPr lvl="4"/>
             <a:r>
-              <a:rPr lang="en-US"/>
+              <a:rPr lang="en-US" smtClean="0"/>
               <a:t>Fifth level</a:t>
             </a:r>
+            <a:endParaRPr lang="en-US"/>
           </a:p>
         </p:txBody>
       </p:sp>
@@ -1668,7 +1666,7 @@
           <a:p>
             <a:pPr lvl="0"/>
             <a:r>
-              <a:rPr lang="en-US"/>
+              <a:rPr lang="en-US" smtClean="0"/>
               <a:t>Click to edit Master text styles</a:t>
             </a:r>
           </a:p>
@@ -1724,37 +1722,38 @@
           <a:p>
             <a:pPr lvl="0"/>
             <a:r>
-              <a:rPr lang="en-US"/>
+              <a:rPr lang="en-US" smtClean="0"/>
               <a:t>Click to edit Master text styles</a:t>
             </a:r>
           </a:p>
           <a:p>
             <a:pPr lvl="1"/>
             <a:r>
-              <a:rPr lang="en-US"/>
+              <a:rPr lang="en-US" smtClean="0"/>
               <a:t>Second level</a:t>
             </a:r>
           </a:p>
           <a:p>
             <a:pPr lvl="2"/>
             <a:r>
-              <a:rPr lang="en-US"/>
+              <a:rPr lang="en-US" smtClean="0"/>
               <a:t>Third level</a:t>
             </a:r>
           </a:p>
           <a:p>
             <a:pPr lvl="3"/>
             <a:r>
-              <a:rPr lang="en-US"/>
+              <a:rPr lang="en-US" smtClean="0"/>
               <a:t>Fourth level</a:t>
             </a:r>
           </a:p>
           <a:p>
             <a:pPr lvl="4"/>
             <a:r>
-              <a:rPr lang="en-US"/>
+              <a:rPr lang="en-US" smtClean="0"/>
               <a:t>Fifth level</a:t>
             </a:r>
+            <a:endParaRPr lang="en-US"/>
           </a:p>
         </p:txBody>
       </p:sp>
@@ -1775,7 +1774,7 @@
           <a:p>
             <a:fld id="{5BCAD085-E8A6-8845-BD4E-CB4CCA059FC4}" type="datetimeFigureOut">
               <a:rPr lang="en-US" smtClean="0"/>
-              <a:t>10/13/2026</a:t>
+              <a:t>1/27/13</a:t>
             </a:fld>
             <a:endParaRPr lang="en-US"/>
           </a:p>
@@ -1869,9 +1868,10 @@
           <a:lstStyle/>
           <a:p>
             <a:r>
-              <a:rPr lang="en-US"/>
+              <a:rPr lang="en-US" smtClean="0"/>
               <a:t>Click to edit Master title style</a:t>
             </a:r>
+            <a:endParaRPr lang="en-US"/>
           </a:p>
         </p:txBody>
       </p:sp>
@@ -1892,7 +1892,7 @@
           <a:p>
             <a:fld id="{5BCAD085-E8A6-8845-BD4E-CB4CCA059FC4}" type="datetimeFigureOut">
               <a:rPr lang="en-US" smtClean="0"/>
-              <a:t>10/13/2026</a:t>
+              <a:t>1/27/13</a:t>
             </a:fld>
             <a:endParaRPr lang="en-US"/>
           </a:p>
@@ -1987,7 +1987,7 @@
           <a:p>
             <a:fld id="{5BCAD085-E8A6-8845-BD4E-CB4CCA059FC4}" type="datetimeFigureOut">
               <a:rPr lang="en-US" smtClean="0"/>
-              <a:t>10/13/2026</a:t>
+              <a:t>1/27/13</a:t>
             </a:fld>
             <a:endParaRPr lang="en-US"/>
           </a:p>
@@ -2090,9 +2090,10 @@
           </a:lstStyle>
           <a:p>
             <a:r>
-              <a:rPr lang="en-US"/>
+              <a:rPr lang="en-US" smtClean="0"/>
               <a:t>Click to edit Master title style</a:t>
             </a:r>
+            <a:endParaRPr lang="en-US"/>
           </a:p>
         </p:txBody>
       </p:sp>
@@ -2146,37 +2147,38 @@
           <a:p>
             <a:pPr lvl="0"/>
             <a:r>
-              <a:rPr lang="en-US"/>
+              <a:rPr lang="en-US" smtClean="0"/>
               <a:t>Click to edit Master text styles</a:t>
             </a:r>
           </a:p>
           <a:p>
             <a:pPr lvl="1"/>
             <a:r>
-              <a:rPr lang="en-US"/>
+              <a:rPr lang="en-US" smtClean="0"/>
               <a:t>Second level</a:t>
             </a:r>
           </a:p>
           <a:p>
             <a:pPr lvl="2"/>
             <a:r>
-              <a:rPr lang="en-US"/>
+              <a:rPr lang="en-US" smtClean="0"/>
               <a:t>Third level</a:t>
             </a:r>
           </a:p>
           <a:p>
             <a:pPr lvl="3"/>
             <a:r>
-              <a:rPr lang="en-US"/>
+              <a:rPr lang="en-US" smtClean="0"/>
               <a:t>Fourth level</a:t>
             </a:r>
           </a:p>
           <a:p>
             <a:pPr lvl="4"/>
             <a:r>
-              <a:rPr lang="en-US"/>
+              <a:rPr lang="en-US" smtClean="0"/>
               <a:t>Fifth level</a:t>
             </a:r>
+            <a:endParaRPr lang="en-US"/>
           </a:p>
         </p:txBody>
       </p:sp>
@@ -2239,7 +2241,7 @@
           <a:p>
             <a:pPr lvl="0"/>
             <a:r>
-              <a:rPr lang="en-US"/>
+              <a:rPr lang="en-US" smtClean="0"/>
               <a:t>Click to edit Master text styles</a:t>
             </a:r>
           </a:p>
@@ -2262,7 +2264,7 @@
           <a:p>
             <a:fld id="{5BCAD085-E8A6-8845-BD4E-CB4CCA059FC4}" type="datetimeFigureOut">
               <a:rPr lang="en-US" smtClean="0"/>
-              <a:t>10/13/2026</a:t>
+              <a:t>1/27/13</a:t>
             </a:fld>
             <a:endParaRPr lang="en-US"/>
           </a:p>
@@ -2365,9 +2367,10 @@
           </a:lstStyle>
           <a:p>
             <a:r>
-              <a:rPr lang="en-US"/>
+              <a:rPr lang="en-US" smtClean="0"/>
               <a:t>Click to edit Master title style</a:t>
             </a:r>
+            <a:endParaRPr lang="en-US"/>
           </a:p>
         </p:txBody>
       </p:sp>
@@ -2491,7 +2494,7 @@
           <a:p>
             <a:pPr lvl="0"/>
             <a:r>
-              <a:rPr lang="en-US"/>
+              <a:rPr lang="en-US" smtClean="0"/>
               <a:t>Click to edit Master text styles</a:t>
             </a:r>
           </a:p>
@@ -2514,7 +2517,7 @@
           <a:p>
             <a:fld id="{5BCAD085-E8A6-8845-BD4E-CB4CCA059FC4}" type="datetimeFigureOut">
               <a:rPr lang="en-US" smtClean="0"/>
-              <a:t>10/13/2026</a:t>
+              <a:t>1/27/13</a:t>
             </a:fld>
             <a:endParaRPr lang="en-US"/>
           </a:p>
@@ -2623,9 +2626,10 @@
           <a:lstStyle/>
           <a:p>
             <a:r>
-              <a:rPr lang="en-US"/>
+              <a:rPr lang="en-US" smtClean="0"/>
               <a:t>Click to edit Master title style</a:t>
             </a:r>
+            <a:endParaRPr lang="en-US"/>
           </a:p>
         </p:txBody>
       </p:sp>
@@ -2656,37 +2660,38 @@
           <a:p>
             <a:pPr lvl="0"/>
             <a:r>
-              <a:rPr lang="en-US"/>
+              <a:rPr lang="en-US" smtClean="0"/>
               <a:t>Click to edit Master text styles</a:t>
             </a:r>
           </a:p>
           <a:p>
             <a:pPr lvl="1"/>
             <a:r>
-              <a:rPr lang="en-US"/>
+              <a:rPr lang="en-US" smtClean="0"/>
               <a:t>Second level</a:t>
             </a:r>
           </a:p>
           <a:p>
             <a:pPr lvl="2"/>
             <a:r>
-              <a:rPr lang="en-US"/>
+              <a:rPr lang="en-US" smtClean="0"/>
               <a:t>Third level</a:t>
             </a:r>
           </a:p>
           <a:p>
             <a:pPr lvl="3"/>
             <a:r>
-              <a:rPr lang="en-US"/>
+              <a:rPr lang="en-US" smtClean="0"/>
               <a:t>Fourth level</a:t>
             </a:r>
           </a:p>
           <a:p>
             <a:pPr lvl="4"/>
             <a:r>
-              <a:rPr lang="en-US"/>
+              <a:rPr lang="en-US" smtClean="0"/>
               <a:t>Fifth level</a:t>
             </a:r>
+            <a:endParaRPr lang="en-US"/>
           </a:p>
         </p:txBody>
       </p:sp>
@@ -2725,7 +2730,7 @@
           <a:p>
             <a:fld id="{5BCAD085-E8A6-8845-BD4E-CB4CCA059FC4}" type="datetimeFigureOut">
               <a:rPr lang="en-US" smtClean="0"/>
-              <a:t>10/13/2026</a:t>
+              <a:t>1/27/13</a:t>
             </a:fld>
             <a:endParaRPr lang="en-US"/>
           </a:p>
@@ -3084,7 +3089,7 @@
 </file>
 
 <file path=ppt/slides/slide1.xml><?xml version="1.0" encoding="utf-8"?>
-<p:sld xmlns:a="http://schemas.openxmlformats.org/drawingml/2006/main" xmlns:r="http://schemas.openxmlformats.org/officeDocument/2006/relationships" xmlns:p="http://schemas.openxmlformats.org/presentationml/2006/main">
+<p:sld xmlns:a="http://schemas.openxmlformats.org/drawingml/2006/main" xmlns:p="http://schemas.openxmlformats.org/presentationml/2006/main" xmlns:r="http://schemas.openxmlformats.org/officeDocument/2006/relationships">
   <p:cSld>
     <p:bg>
       <p:bgPr>
@@ -3100,14 +3105,7 @@
         <p:cNvGrpSpPr/>
         <p:nvPr/>
       </p:nvGrpSpPr>
-      <p:grpSpPr>
-        <a:xfrm>
-          <a:off x="0" y="0"/>
-          <a:ext cx="0" cy="0"/>
-          <a:chOff x="0" y="0"/>
-          <a:chExt cx="0" cy="0"/>
-        </a:xfrm>
-      </p:grpSpPr>
+      <p:grpSpPr/>
       <p:sp>
         <p:nvSpPr>
           <p:cNvPr id="2" name="Rounded Rectangle 1"/>
@@ -3144,7 +3142,7 @@
           </a:fontRef>
         </p:style>
         <p:txBody>
-          <a:bodyPr lIns="0" tIns="0" rIns="0" bIns="0" rtlCol="0" anchor="ctr"/>
+          <a:bodyPr rtlCol="0" anchor="ctr" lIns="0" rIns="0" tIns="0" bIns="0"/>
           <a:lstStyle/>
           <a:p>
             <a:pPr algn="ctr">
@@ -3195,43 +3193,11 @@
               </a:defRPr>
             </a:pPr>
             <a:r>
-              <a:rPr dirty="0" err="1"/>
-              <a:t>Peningkatan</a:t>
-            </a:r>
-            <a:r>
-              <a:rPr dirty="0"/>
-              <a:t> Recall </a:t>
-            </a:r>
-            <a:r>
-              <a:rPr dirty="0" err="1"/>
-              <a:t>Deteksi</a:t>
-            </a:r>
-            <a:r>
-              <a:rPr dirty="0"/>
-              <a:t> </a:t>
-            </a:r>
-            <a:r>
-              <a:rPr dirty="0" err="1"/>
-              <a:t>Pejalan</a:t>
-            </a:r>
-            <a:r>
-              <a:rPr dirty="0"/>
-              <a:t> Kaki</a:t>
-            </a:r>
-            <a:br>
-              <a:rPr dirty="0"/>
-            </a:br>
-            <a:r>
-              <a:rPr dirty="0"/>
-              <a:t>pada </a:t>
-            </a:r>
-            <a:r>
-              <a:rPr dirty="0" err="1"/>
-              <a:t>Kondisi</a:t>
-            </a:r>
-            <a:r>
-              <a:rPr dirty="0"/>
-              <a:t> Minim Cahaya</a:t>
+              <a:t>Peningkatan Recall Deteksi Pejalan Kaki</a:t>
+            </a:r>
+            <a:br/>
+            <a:r>
+              <a:t>pada Kondisi Minim Cahaya</a:t>
             </a:r>
           </a:p>
           <a:p>
@@ -3244,44 +3210,7 @@
               </a:defRPr>
             </a:pPr>
             <a:r>
-              <a:rPr dirty="0" err="1"/>
-              <a:t>Menggunakan</a:t>
-            </a:r>
-            <a:r>
-              <a:rPr dirty="0"/>
-              <a:t> YOLOv8-Nano dan </a:t>
-            </a:r>
-            <a:r>
-              <a:rPr dirty="0" err="1"/>
-              <a:t>Prapemrosesan</a:t>
-            </a:r>
-            <a:r>
-              <a:rPr dirty="0"/>
-              <a:t> </a:t>
-            </a:r>
-            <a:r>
-              <a:rPr dirty="0" err="1"/>
-              <a:t>Augmentasi</a:t>
-            </a:r>
-            <a:r>
-              <a:rPr dirty="0"/>
-              <a:t> </a:t>
-            </a:r>
-            <a:r>
-              <a:rPr dirty="0" err="1"/>
-              <a:t>Pencahayaan</a:t>
-            </a:r>
-            <a:r>
-              <a:rPr dirty="0"/>
-              <a:t> </a:t>
-            </a:r>
-            <a:r>
-              <a:rPr dirty="0" err="1"/>
-              <a:t>Adaptif</a:t>
-            </a:r>
-            <a:r>
-              <a:rPr dirty="0"/>
-              <a:t> (CLAHE &amp; Gamma Correction)</a:t>
+              <a:t>Menggunakan YOLOv8-Nano dan Prapemrosesan Augmentasi Pencahayaan Adaptif (CLAHE &amp; Gamma Correction)</a:t>
             </a:r>
           </a:p>
         </p:txBody>
@@ -3328,7 +3257,6 @@
           <a:lstStyle/>
           <a:p>
             <a:pPr algn="ctr"/>
-            <a:endParaRPr/>
           </a:p>
         </p:txBody>
       </p:sp>
@@ -3379,7 +3307,7 @@
               </a:defRPr>
             </a:pPr>
             <a:r>
-              <a:t>•  Krisantus Linardi  —  Data &amp; Preprocessing Lead</a:t>
+              <a:t>•  Krisantus Amka Ginting  —  Data &amp; Preprocessing Lead</a:t>
             </a:r>
           </a:p>
           <a:p>
@@ -3408,7 +3336,7 @@
               </a:defRPr>
             </a:pPr>
             <a:r>
-              <a:t>•  Kristofer Leonard  —  Model &amp; Deployment Lead</a:t>
+              <a:t>•  Linardi Halim  —  Documentation &amp; Reporting Lead</a:t>
             </a:r>
           </a:p>
           <a:p>
@@ -3421,7 +3349,59 @@
               </a:defRPr>
             </a:pPr>
             <a:r>
-              <a:t>    Pelatihan model YOLOv8-Nano, eksperimen terkontrol komparatif, evaluasi Recall, dan prototype Streamlit.</a:t>
+              <a:t>    Penyusunan proposal dan laporan teknis, naskah presentasi, serta rekap tracker dan logbook.</a:t>
+            </a:r>
+          </a:p>
+          <a:p>
+            <a:pPr>
+              <a:defRPr sz="1200" b="1">
+                <a:solidFill>
+                  <a:srgbClr val="F8FAFC"/>
+                </a:solidFill>
+                <a:latin typeface="Segoe UI"/>
+              </a:defRPr>
+            </a:pPr>
+            <a:r>
+              <a:t>•  Kristofer Ryan Giggs Eka Saputra  —  Model &amp; Training Lead</a:t>
+            </a:r>
+          </a:p>
+          <a:p>
+            <a:pPr>
+              <a:defRPr sz="1000">
+                <a:solidFill>
+                  <a:srgbClr val="94A3B8"/>
+                </a:solidFill>
+                <a:latin typeface="Segoe UI"/>
+              </a:defRPr>
+            </a:pPr>
+            <a:r>
+              <a:t>    Pelatihan model YOLOv8-Nano, eksperimen terkontrol komparatif, evaluasi Recall, dan benchmark FPS.</a:t>
+            </a:r>
+          </a:p>
+          <a:p>
+            <a:pPr>
+              <a:defRPr sz="1200" b="1">
+                <a:solidFill>
+                  <a:srgbClr val="F8FAFC"/>
+                </a:solidFill>
+                <a:latin typeface="Segoe UI"/>
+              </a:defRPr>
+            </a:pPr>
+            <a:r>
+              <a:t>•  Leonard Franscois  —  Demo &amp; Deployment Lead</a:t>
+            </a:r>
+          </a:p>
+          <a:p>
+            <a:pPr>
+              <a:defRPr sz="1000">
+                <a:solidFill>
+                  <a:srgbClr val="94A3B8"/>
+                </a:solidFill>
+                <a:latin typeface="Segoe UI"/>
+              </a:defRPr>
+            </a:pPr>
+            <a:r>
+              <a:t>    Prototype demo inferensi, dokumentasi repository, dan organisational video cadangan.</a:t>
             </a:r>
           </a:p>
         </p:txBody>
@@ -3435,7 +3415,7 @@
 </file>
 
 <file path=ppt/slides/slide10.xml><?xml version="1.0" encoding="utf-8"?>
-<p:sld xmlns:a="http://schemas.openxmlformats.org/drawingml/2006/main" xmlns:r="http://schemas.openxmlformats.org/officeDocument/2006/relationships" xmlns:p="http://schemas.openxmlformats.org/presentationml/2006/main">
+<p:sld xmlns:a="http://schemas.openxmlformats.org/drawingml/2006/main" xmlns:p="http://schemas.openxmlformats.org/presentationml/2006/main" xmlns:r="http://schemas.openxmlformats.org/officeDocument/2006/relationships">
   <p:cSld>
     <p:bg>
       <p:bgPr>
@@ -3451,14 +3431,7 @@
         <p:cNvGrpSpPr/>
         <p:nvPr/>
       </p:nvGrpSpPr>
-      <p:grpSpPr>
-        <a:xfrm>
-          <a:off x="0" y="0"/>
-          <a:ext cx="0" cy="0"/>
-          <a:chOff x="0" y="0"/>
-          <a:chExt cx="0" cy="0"/>
-        </a:xfrm>
-      </p:grpSpPr>
+      <p:grpSpPr/>
       <p:sp>
         <p:nvSpPr>
           <p:cNvPr id="2" name="TextBox 1"/>
@@ -3609,7 +3582,6 @@
           <a:lstStyle/>
           <a:p>
             <a:pPr algn="ctr"/>
-            <a:endParaRPr/>
           </a:p>
         </p:txBody>
       </p:sp>
@@ -3758,7 +3730,6 @@
           <a:lstStyle/>
           <a:p>
             <a:pPr algn="ctr"/>
-            <a:endParaRPr/>
           </a:p>
         </p:txBody>
       </p:sp>
@@ -3907,7 +3878,6 @@
           <a:lstStyle/>
           <a:p>
             <a:pPr algn="ctr"/>
-            <a:endParaRPr/>
           </a:p>
         </p:txBody>
       </p:sp>
@@ -4056,7 +4026,6 @@
           <a:lstStyle/>
           <a:p>
             <a:pPr algn="ctr"/>
-            <a:endParaRPr/>
           </a:p>
         </p:txBody>
       </p:sp>
@@ -4208,7 +4177,7 @@
 </file>
 
 <file path=ppt/slides/slide11.xml><?xml version="1.0" encoding="utf-8"?>
-<p:sld xmlns:a="http://schemas.openxmlformats.org/drawingml/2006/main" xmlns:r="http://schemas.openxmlformats.org/officeDocument/2006/relationships" xmlns:p="http://schemas.openxmlformats.org/presentationml/2006/main">
+<p:sld xmlns:a="http://schemas.openxmlformats.org/drawingml/2006/main" xmlns:p="http://schemas.openxmlformats.org/presentationml/2006/main" xmlns:r="http://schemas.openxmlformats.org/officeDocument/2006/relationships">
   <p:cSld>
     <p:bg>
       <p:bgPr>
@@ -4224,14 +4193,7 @@
         <p:cNvGrpSpPr/>
         <p:nvPr/>
       </p:nvGrpSpPr>
-      <p:grpSpPr>
-        <a:xfrm>
-          <a:off x="0" y="0"/>
-          <a:ext cx="0" cy="0"/>
-          <a:chOff x="0" y="0"/>
-          <a:chExt cx="0" cy="0"/>
-        </a:xfrm>
-      </p:grpSpPr>
+      <p:grpSpPr/>
       <p:sp>
         <p:nvSpPr>
           <p:cNvPr id="2" name="Rounded Rectangle 1"/>
@@ -4274,7 +4236,6 @@
           <a:lstStyle/>
           <a:p>
             <a:pPr algn="ctr"/>
-            <a:endParaRPr/>
           </a:p>
         </p:txBody>
       </p:sp>
@@ -4361,7 +4322,7 @@
               </a:defRPr>
             </a:pPr>
             <a:r>
-              <a:t>Kelompok 9 (Kelas 5PITA) — Krisantus Linardi &amp; Kristofer Leonard</a:t>
+              <a:t>Kelompok 9 (Kelas 5PITA) — Krisantus Amka Ginting, Linardi Halim, Kristofer Ryan Giggs Eka Saputra, Leonard Franscois</a:t>
             </a:r>
             <a:br/>
             <a:r>
@@ -4415,7 +4376,7 @@
 </file>
 
 <file path=ppt/slides/slide2.xml><?xml version="1.0" encoding="utf-8"?>
-<p:sld xmlns:a="http://schemas.openxmlformats.org/drawingml/2006/main" xmlns:r="http://schemas.openxmlformats.org/officeDocument/2006/relationships" xmlns:p="http://schemas.openxmlformats.org/presentationml/2006/main">
+<p:sld xmlns:a="http://schemas.openxmlformats.org/drawingml/2006/main" xmlns:p="http://schemas.openxmlformats.org/presentationml/2006/main" xmlns:r="http://schemas.openxmlformats.org/officeDocument/2006/relationships">
   <p:cSld>
     <p:bg>
       <p:bgPr>
@@ -4431,14 +4392,7 @@
         <p:cNvGrpSpPr/>
         <p:nvPr/>
       </p:nvGrpSpPr>
-      <p:grpSpPr>
-        <a:xfrm>
-          <a:off x="0" y="0"/>
-          <a:ext cx="0" cy="0"/>
-          <a:chOff x="0" y="0"/>
-          <a:chExt cx="0" cy="0"/>
-        </a:xfrm>
-      </p:grpSpPr>
+      <p:grpSpPr/>
       <p:sp>
         <p:nvSpPr>
           <p:cNvPr id="2" name="TextBox 1"/>
@@ -4470,7 +4424,6 @@
               </a:defRPr>
             </a:pPr>
             <a:r>
-              <a:rPr dirty="0"/>
               <a:t>01. LATAR BELAKANG &amp; URGENSI MASALAH</a:t>
             </a:r>
           </a:p>
@@ -4507,36 +4460,7 @@
               </a:defRPr>
             </a:pPr>
             <a:r>
-              <a:rPr dirty="0" err="1"/>
-              <a:t>Mengapa</a:t>
-            </a:r>
-            <a:r>
-              <a:rPr dirty="0"/>
-              <a:t> </a:t>
-            </a:r>
-            <a:r>
-              <a:rPr dirty="0" err="1"/>
-              <a:t>Deteksi</a:t>
-            </a:r>
-            <a:r>
-              <a:rPr dirty="0"/>
-              <a:t> </a:t>
-            </a:r>
-            <a:r>
-              <a:rPr dirty="0" err="1"/>
-              <a:t>Pejalan</a:t>
-            </a:r>
-            <a:r>
-              <a:rPr dirty="0"/>
-              <a:t> Kaki Malam Hari Sangat </a:t>
-            </a:r>
-            <a:r>
-              <a:rPr dirty="0" err="1"/>
-              <a:t>Kritis</a:t>
-            </a:r>
-            <a:r>
-              <a:rPr dirty="0"/>
-              <a:t>?</a:t>
+              <a:t>Mengapa Deteksi Pejalan Kaki Malam Hari Sangat Kritis?</a:t>
             </a:r>
           </a:p>
         </p:txBody>
@@ -4619,7 +4543,6 @@
           <a:lstStyle/>
           <a:p>
             <a:pPr algn="ctr"/>
-            <a:endParaRPr/>
           </a:p>
         </p:txBody>
       </p:sp>
@@ -4654,8 +4577,7 @@
               </a:defRPr>
             </a:pPr>
             <a:r>
-              <a:rPr dirty="0"/>
-              <a:t>FAKTA KESELAMATAN JALAN: 70%+ KECELAKAAN FATAL TERJADI SAAT GELAP</a:t>
+              <a:t>FAKTA KESELAMATAN JALAN: 76% KECELAKAAN FATAL TERJADI SAAT GELAP (SUMBER: NHTSA &amp; IIHS)</a:t>
             </a:r>
           </a:p>
           <a:p>
@@ -4668,196 +4590,7 @@
               </a:defRPr>
             </a:pPr>
             <a:r>
-              <a:rPr dirty="0" err="1"/>
-              <a:t>Statistik</a:t>
-            </a:r>
-            <a:r>
-              <a:rPr dirty="0"/>
-              <a:t> </a:t>
-            </a:r>
-            <a:r>
-              <a:rPr dirty="0" err="1"/>
-              <a:t>kecelakaan</a:t>
-            </a:r>
-            <a:r>
-              <a:rPr dirty="0"/>
-              <a:t> </a:t>
-            </a:r>
-            <a:r>
-              <a:rPr dirty="0" err="1"/>
-              <a:t>lalu</a:t>
-            </a:r>
-            <a:r>
-              <a:rPr dirty="0"/>
-              <a:t> </a:t>
-            </a:r>
-            <a:r>
-              <a:rPr dirty="0" err="1"/>
-              <a:t>lintas</a:t>
-            </a:r>
-            <a:r>
-              <a:rPr dirty="0"/>
-              <a:t> </a:t>
-            </a:r>
-            <a:r>
-              <a:rPr dirty="0" err="1"/>
-              <a:t>menunjukkan</a:t>
-            </a:r>
-            <a:r>
-              <a:rPr dirty="0"/>
-              <a:t> </a:t>
-            </a:r>
-            <a:r>
-              <a:rPr dirty="0" err="1"/>
-              <a:t>risiko</a:t>
-            </a:r>
-            <a:r>
-              <a:rPr dirty="0"/>
-              <a:t> </a:t>
-            </a:r>
-            <a:r>
-              <a:rPr dirty="0" err="1"/>
-              <a:t>fatalitas</a:t>
-            </a:r>
-            <a:r>
-              <a:rPr dirty="0"/>
-              <a:t> </a:t>
-            </a:r>
-            <a:r>
-              <a:rPr dirty="0" err="1"/>
-              <a:t>pejalan</a:t>
-            </a:r>
-            <a:r>
-              <a:rPr dirty="0"/>
-              <a:t> kaki </a:t>
-            </a:r>
-            <a:r>
-              <a:rPr dirty="0" err="1"/>
-              <a:t>meningkat</a:t>
-            </a:r>
-            <a:r>
-              <a:rPr dirty="0"/>
-              <a:t> </a:t>
-            </a:r>
-            <a:r>
-              <a:rPr dirty="0" err="1"/>
-              <a:t>drastis</a:t>
-            </a:r>
-            <a:r>
-              <a:rPr dirty="0"/>
-              <a:t> pada </a:t>
-            </a:r>
-            <a:r>
-              <a:rPr dirty="0" err="1"/>
-              <a:t>kondisi</a:t>
-            </a:r>
-            <a:r>
-              <a:rPr dirty="0"/>
-              <a:t> </a:t>
-            </a:r>
-            <a:r>
-              <a:rPr dirty="0" err="1"/>
-              <a:t>malam</a:t>
-            </a:r>
-            <a:r>
-              <a:rPr dirty="0"/>
-              <a:t> </a:t>
-            </a:r>
-            <a:r>
-              <a:rPr dirty="0" err="1"/>
-              <a:t>hari</a:t>
-            </a:r>
-            <a:r>
-              <a:rPr dirty="0"/>
-              <a:t> </a:t>
-            </a:r>
-            <a:r>
-              <a:rPr dirty="0" err="1"/>
-              <a:t>akibat</a:t>
-            </a:r>
-            <a:r>
-              <a:rPr dirty="0"/>
-              <a:t> </a:t>
-            </a:r>
-            <a:r>
-              <a:rPr dirty="0" err="1"/>
-              <a:t>keterbatasan</a:t>
-            </a:r>
-            <a:r>
-              <a:rPr dirty="0"/>
-              <a:t> </a:t>
-            </a:r>
-            <a:r>
-              <a:rPr dirty="0" err="1"/>
-              <a:t>visibilitas</a:t>
-            </a:r>
-            <a:r>
-              <a:rPr dirty="0"/>
-              <a:t> </a:t>
-            </a:r>
-            <a:r>
-              <a:rPr dirty="0" err="1"/>
-              <a:t>pengemudi</a:t>
-            </a:r>
-            <a:r>
-              <a:rPr dirty="0"/>
-              <a:t> dan </a:t>
-            </a:r>
-            <a:r>
-              <a:rPr dirty="0" err="1"/>
-              <a:t>kegagalan</a:t>
-            </a:r>
-            <a:r>
-              <a:rPr dirty="0"/>
-              <a:t> sensor </a:t>
-            </a:r>
-            <a:r>
-              <a:rPr dirty="0" err="1"/>
-              <a:t>optik</a:t>
-            </a:r>
-            <a:r>
-              <a:rPr dirty="0"/>
-              <a:t> </a:t>
-            </a:r>
-            <a:r>
-              <a:rPr dirty="0" err="1"/>
-              <a:t>standar</a:t>
-            </a:r>
-            <a:r>
-              <a:rPr dirty="0"/>
-              <a:t> </a:t>
-            </a:r>
-            <a:r>
-              <a:rPr dirty="0" err="1"/>
-              <a:t>mengenali</a:t>
-            </a:r>
-            <a:r>
-              <a:rPr dirty="0"/>
-              <a:t> </a:t>
-            </a:r>
-            <a:r>
-              <a:rPr dirty="0" err="1"/>
-              <a:t>objek</a:t>
-            </a:r>
-            <a:r>
-              <a:rPr dirty="0"/>
-              <a:t> </a:t>
-            </a:r>
-            <a:r>
-              <a:rPr dirty="0" err="1"/>
-              <a:t>bersiluet</a:t>
-            </a:r>
-            <a:r>
-              <a:rPr dirty="0"/>
-              <a:t> </a:t>
-            </a:r>
-            <a:r>
-              <a:rPr dirty="0" err="1"/>
-              <a:t>gelap</a:t>
-            </a:r>
-            <a:r>
-              <a:rPr dirty="0"/>
-              <a:t>.</a:t>
+              <a:t>Berdasarkan laporan resmi NHTSA Traffic Safety Facts &amp; IIHS FARS, ~76% fatalitas pejalan kaki terjadi pada kondisi gelap/malam hari akibat keterbatasan visibilitas pengemudi dan kegagalan sensor optik standar.</a:t>
             </a:r>
           </a:p>
         </p:txBody>
@@ -4904,7 +4637,6 @@
           <a:lstStyle/>
           <a:p>
             <a:pPr algn="ctr"/>
-            <a:endParaRPr/>
           </a:p>
         </p:txBody>
       </p:sp>
@@ -4942,7 +4674,6 @@
               </a:defRPr>
             </a:pPr>
             <a:r>
-              <a:rPr dirty="0"/>
               <a:t>FAKTOR KESELAMATAN JIWA</a:t>
             </a:r>
           </a:p>
@@ -4959,7 +4690,6 @@
               </a:defRPr>
             </a:pPr>
             <a:r>
-              <a:rPr dirty="0"/>
               <a:t>Vulnerable Road Users</a:t>
             </a:r>
           </a:p>
@@ -4976,80 +4706,7 @@
               </a:defRPr>
             </a:pPr>
             <a:r>
-              <a:rPr dirty="0"/>
-              <a:t>•  </a:t>
-            </a:r>
-            <a:r>
-              <a:rPr dirty="0" err="1"/>
-              <a:t>Pejalan</a:t>
-            </a:r>
-            <a:r>
-              <a:rPr dirty="0"/>
-              <a:t> kaki </a:t>
-            </a:r>
-            <a:r>
-              <a:rPr dirty="0" err="1"/>
-              <a:t>tidak</a:t>
-            </a:r>
-            <a:r>
-              <a:rPr dirty="0"/>
-              <a:t> </a:t>
-            </a:r>
-            <a:r>
-              <a:rPr dirty="0" err="1"/>
-              <a:t>memiliki</a:t>
-            </a:r>
-            <a:r>
-              <a:rPr dirty="0"/>
-              <a:t> </a:t>
-            </a:r>
-            <a:r>
-              <a:rPr dirty="0" err="1"/>
-              <a:t>proteksi</a:t>
-            </a:r>
-            <a:r>
-              <a:rPr dirty="0"/>
-              <a:t> </a:t>
-            </a:r>
-            <a:r>
-              <a:rPr dirty="0" err="1"/>
-              <a:t>fisik</a:t>
-            </a:r>
-            <a:r>
-              <a:rPr dirty="0"/>
-              <a:t> </a:t>
-            </a:r>
-            <a:r>
-              <a:rPr dirty="0" err="1"/>
-              <a:t>layaknya</a:t>
-            </a:r>
-            <a:r>
-              <a:rPr dirty="0"/>
-              <a:t> </a:t>
-            </a:r>
-            <a:r>
-              <a:rPr dirty="0" err="1"/>
-              <a:t>penumpang</a:t>
-            </a:r>
-            <a:r>
-              <a:rPr dirty="0"/>
-              <a:t> </a:t>
-            </a:r>
-            <a:r>
-              <a:rPr dirty="0" err="1"/>
-              <a:t>kendaraan</a:t>
-            </a:r>
-            <a:r>
-              <a:rPr dirty="0"/>
-              <a:t> </a:t>
-            </a:r>
-            <a:r>
-              <a:rPr dirty="0" err="1"/>
-              <a:t>bermotor</a:t>
-            </a:r>
-            <a:r>
-              <a:rPr dirty="0"/>
-              <a:t>.</a:t>
+              <a:t>•  Pejalan kaki tidak memiliki proteksi fisik layaknya penumpang kendaraan bermotor.</a:t>
             </a:r>
           </a:p>
           <a:p>
@@ -5065,104 +4722,7 @@
               </a:defRPr>
             </a:pPr>
             <a:r>
-              <a:rPr dirty="0"/>
-              <a:t>•  Di </a:t>
-            </a:r>
-            <a:r>
-              <a:rPr dirty="0" err="1"/>
-              <a:t>malam</a:t>
-            </a:r>
-            <a:r>
-              <a:rPr dirty="0"/>
-              <a:t> </a:t>
-            </a:r>
-            <a:r>
-              <a:rPr dirty="0" err="1"/>
-              <a:t>hari</a:t>
-            </a:r>
-            <a:r>
-              <a:rPr dirty="0"/>
-              <a:t>, </a:t>
-            </a:r>
-            <a:r>
-              <a:rPr dirty="0" err="1"/>
-              <a:t>pakaian</a:t>
-            </a:r>
-            <a:r>
-              <a:rPr dirty="0"/>
-              <a:t> </a:t>
-            </a:r>
-            <a:r>
-              <a:rPr dirty="0" err="1"/>
-              <a:t>gelap</a:t>
-            </a:r>
-            <a:r>
-              <a:rPr dirty="0"/>
-              <a:t> dan </a:t>
-            </a:r>
-            <a:r>
-              <a:rPr dirty="0" err="1"/>
-              <a:t>pencahayaan</a:t>
-            </a:r>
-            <a:r>
-              <a:rPr dirty="0"/>
-              <a:t> </a:t>
-            </a:r>
-            <a:r>
-              <a:rPr dirty="0" err="1"/>
-              <a:t>lampu</a:t>
-            </a:r>
-            <a:r>
-              <a:rPr dirty="0"/>
-              <a:t> </a:t>
-            </a:r>
-            <a:r>
-              <a:rPr dirty="0" err="1"/>
-              <a:t>jalan</a:t>
-            </a:r>
-            <a:r>
-              <a:rPr dirty="0"/>
-              <a:t> minim </a:t>
-            </a:r>
-            <a:r>
-              <a:rPr dirty="0" err="1"/>
-              <a:t>membuat</a:t>
-            </a:r>
-            <a:r>
-              <a:rPr dirty="0"/>
-              <a:t> </a:t>
-            </a:r>
-            <a:r>
-              <a:rPr dirty="0" err="1"/>
-              <a:t>pejalan</a:t>
-            </a:r>
-            <a:r>
-              <a:rPr dirty="0"/>
-              <a:t> kaki </a:t>
-            </a:r>
-            <a:r>
-              <a:rPr dirty="0" err="1"/>
-              <a:t>hampir</a:t>
-            </a:r>
-            <a:r>
-              <a:rPr dirty="0"/>
-              <a:t> </a:t>
-            </a:r>
-            <a:r>
-              <a:rPr dirty="0" err="1"/>
-              <a:t>tak</a:t>
-            </a:r>
-            <a:r>
-              <a:rPr dirty="0"/>
-              <a:t> </a:t>
-            </a:r>
-            <a:r>
-              <a:rPr dirty="0" err="1"/>
-              <a:t>terlihat</a:t>
-            </a:r>
-            <a:r>
-              <a:rPr dirty="0"/>
-              <a:t>.</a:t>
+              <a:t>•  Di malam hari, pakaian gelap dan pencahayaan lampu jalan minim membuat pejalan kaki hampir tak terlihat.</a:t>
             </a:r>
           </a:p>
           <a:p>
@@ -5178,80 +4738,7 @@
               </a:defRPr>
             </a:pPr>
             <a:r>
-              <a:rPr dirty="0"/>
-              <a:t>•  </a:t>
-            </a:r>
-            <a:r>
-              <a:rPr dirty="0" err="1"/>
-              <a:t>Sistem</a:t>
-            </a:r>
-            <a:r>
-              <a:rPr dirty="0"/>
-              <a:t> </a:t>
-            </a:r>
-            <a:r>
-              <a:rPr dirty="0" err="1"/>
-              <a:t>deteksi</a:t>
-            </a:r>
-            <a:r>
-              <a:rPr dirty="0"/>
-              <a:t> </a:t>
-            </a:r>
-            <a:r>
-              <a:rPr dirty="0" err="1"/>
-              <a:t>dini</a:t>
-            </a:r>
-            <a:r>
-              <a:rPr dirty="0"/>
-              <a:t> </a:t>
-            </a:r>
-            <a:r>
-              <a:rPr dirty="0" err="1"/>
-              <a:t>adalah</a:t>
-            </a:r>
-            <a:r>
-              <a:rPr dirty="0"/>
-              <a:t> </a:t>
-            </a:r>
-            <a:r>
-              <a:rPr dirty="0" err="1"/>
-              <a:t>satu-satunya</a:t>
-            </a:r>
-            <a:r>
-              <a:rPr dirty="0"/>
-              <a:t> </a:t>
-            </a:r>
-            <a:r>
-              <a:rPr dirty="0" err="1"/>
-              <a:t>pertahanan</a:t>
-            </a:r>
-            <a:r>
-              <a:rPr dirty="0"/>
-              <a:t> </a:t>
-            </a:r>
-            <a:r>
-              <a:rPr dirty="0" err="1"/>
-              <a:t>pencegah</a:t>
-            </a:r>
-            <a:r>
-              <a:rPr dirty="0"/>
-              <a:t> </a:t>
-            </a:r>
-            <a:r>
-              <a:rPr dirty="0" err="1"/>
-              <a:t>tabrakan</a:t>
-            </a:r>
-            <a:r>
-              <a:rPr dirty="0"/>
-              <a:t> di </a:t>
-            </a:r>
-            <a:r>
-              <a:rPr dirty="0" err="1"/>
-              <a:t>sistem</a:t>
-            </a:r>
-            <a:r>
-              <a:rPr dirty="0"/>
-              <a:t> ADAS modern.</a:t>
+              <a:t>•  Sistem deteksi dini adalah satu-satunya pertahanan pencegah tabrakan di sistem ADAS modern.</a:t>
             </a:r>
           </a:p>
         </p:txBody>
@@ -5298,7 +4785,6 @@
           <a:lstStyle/>
           <a:p>
             <a:pPr algn="ctr"/>
-            <a:endParaRPr/>
           </a:p>
         </p:txBody>
       </p:sp>
@@ -5311,7 +4797,7 @@
         <p:spPr>
           <a:xfrm>
             <a:off x="4608576" y="3172968"/>
-            <a:ext cx="2971800" cy="2146742"/>
+            <a:ext cx="2971800" cy="2798064"/>
           </a:xfrm>
           <a:prstGeom prst="rect">
             <a:avLst/>
@@ -5336,7 +4822,6 @@
               </a:defRPr>
             </a:pPr>
             <a:r>
-              <a:rPr dirty="0"/>
               <a:t>TANTANGAN SENSORIK</a:t>
             </a:r>
           </a:p>
@@ -5353,12 +4838,7 @@
               </a:defRPr>
             </a:pPr>
             <a:r>
-              <a:rPr dirty="0" err="1"/>
-              <a:t>Keterbatasan</a:t>
-            </a:r>
-            <a:r>
-              <a:rPr dirty="0"/>
-              <a:t> Kamera Optik</a:t>
+              <a:t>Keterbatasan Kamera Optik</a:t>
             </a:r>
           </a:p>
           <a:p>
@@ -5374,64 +4854,7 @@
               </a:defRPr>
             </a:pPr>
             <a:r>
-              <a:rPr dirty="0"/>
-              <a:t>•  Kamera RGB </a:t>
-            </a:r>
-            <a:r>
-              <a:rPr dirty="0" err="1"/>
-              <a:t>standar</a:t>
-            </a:r>
-            <a:r>
-              <a:rPr dirty="0"/>
-              <a:t> </a:t>
-            </a:r>
-            <a:r>
-              <a:rPr dirty="0" err="1"/>
-              <a:t>mengalami</a:t>
-            </a:r>
-            <a:r>
-              <a:rPr dirty="0"/>
-              <a:t> </a:t>
-            </a:r>
-            <a:r>
-              <a:rPr dirty="0" err="1"/>
-              <a:t>penurunan</a:t>
-            </a:r>
-            <a:r>
-              <a:rPr dirty="0"/>
-              <a:t> SNR (Signal-to-Noise Ratio) </a:t>
-            </a:r>
-            <a:r>
-              <a:rPr dirty="0" err="1"/>
-              <a:t>ekstrem</a:t>
-            </a:r>
-            <a:r>
-              <a:rPr dirty="0"/>
-              <a:t> pada </a:t>
-            </a:r>
-            <a:r>
-              <a:rPr dirty="0" err="1"/>
-              <a:t>intensitas</a:t>
-            </a:r>
-            <a:r>
-              <a:rPr dirty="0"/>
-              <a:t> </a:t>
-            </a:r>
-            <a:r>
-              <a:rPr dirty="0" err="1"/>
-              <a:t>foton</a:t>
-            </a:r>
-            <a:r>
-              <a:rPr dirty="0"/>
-              <a:t> </a:t>
-            </a:r>
-            <a:r>
-              <a:rPr dirty="0" err="1"/>
-              <a:t>rendah</a:t>
-            </a:r>
-            <a:r>
-              <a:rPr dirty="0"/>
-              <a:t>.</a:t>
+              <a:t>•  Kamera RGB standar mengalami penurunan SNR (Signal-to-Noise Ratio) ekstrem pada intensitas foton rendah.</a:t>
             </a:r>
           </a:p>
           <a:p>
@@ -5447,72 +4870,7 @@
               </a:defRPr>
             </a:pPr>
             <a:r>
-              <a:rPr dirty="0"/>
-              <a:t>•  Solusi sensor </a:t>
-            </a:r>
-            <a:r>
-              <a:rPr dirty="0" err="1"/>
-              <a:t>aktif</a:t>
-            </a:r>
-            <a:r>
-              <a:rPr dirty="0"/>
-              <a:t> </a:t>
-            </a:r>
-            <a:r>
-              <a:rPr dirty="0" err="1"/>
-              <a:t>seperti</a:t>
-            </a:r>
-            <a:r>
-              <a:rPr dirty="0"/>
-              <a:t> LiDAR </a:t>
-            </a:r>
-            <a:r>
-              <a:rPr dirty="0" err="1"/>
-              <a:t>atau</a:t>
-            </a:r>
-            <a:r>
-              <a:rPr dirty="0"/>
-              <a:t> Thermal IR </a:t>
-            </a:r>
-            <a:r>
-              <a:rPr dirty="0" err="1"/>
-              <a:t>berbiaya</a:t>
-            </a:r>
-            <a:r>
-              <a:rPr dirty="0"/>
-              <a:t> sangat </a:t>
-            </a:r>
-            <a:r>
-              <a:rPr dirty="0" err="1"/>
-              <a:t>tinggi</a:t>
-            </a:r>
-            <a:r>
-              <a:rPr dirty="0"/>
-              <a:t> </a:t>
-            </a:r>
-            <a:r>
-              <a:rPr dirty="0" err="1"/>
-              <a:t>untuk</a:t>
-            </a:r>
-            <a:r>
-              <a:rPr dirty="0"/>
-              <a:t> </a:t>
-            </a:r>
-            <a:r>
-              <a:rPr dirty="0" err="1"/>
-              <a:t>kendaraan</a:t>
-            </a:r>
-            <a:r>
-              <a:rPr dirty="0"/>
-              <a:t> </a:t>
-            </a:r>
-            <a:r>
-              <a:rPr dirty="0" err="1"/>
-              <a:t>massal</a:t>
-            </a:r>
-            <a:r>
-              <a:rPr dirty="0"/>
-              <a:t>.</a:t>
+              <a:t>•  Solusi sensor aktif seperti LiDAR atau Thermal IR berbiaya sangat tinggi ($$$) untuk kendaraan massal.</a:t>
             </a:r>
           </a:p>
           <a:p>
@@ -5528,80 +4886,7 @@
               </a:defRPr>
             </a:pPr>
             <a:r>
-              <a:rPr dirty="0"/>
-              <a:t>•  </a:t>
-            </a:r>
-            <a:r>
-              <a:rPr dirty="0" err="1"/>
-              <a:t>Diperlukan</a:t>
-            </a:r>
-            <a:r>
-              <a:rPr dirty="0"/>
-              <a:t> </a:t>
-            </a:r>
-            <a:r>
-              <a:rPr dirty="0" err="1"/>
-              <a:t>solusi</a:t>
-            </a:r>
-            <a:r>
-              <a:rPr dirty="0"/>
-              <a:t> </a:t>
-            </a:r>
-            <a:r>
-              <a:rPr dirty="0" err="1"/>
-              <a:t>berbasis</a:t>
-            </a:r>
-            <a:r>
-              <a:rPr dirty="0"/>
-              <a:t> software </a:t>
-            </a:r>
-            <a:r>
-              <a:rPr dirty="0" err="1"/>
-              <a:t>visi</a:t>
-            </a:r>
-            <a:r>
-              <a:rPr dirty="0"/>
-              <a:t> </a:t>
-            </a:r>
-            <a:r>
-              <a:rPr dirty="0" err="1"/>
-              <a:t>komputer</a:t>
-            </a:r>
-            <a:r>
-              <a:rPr dirty="0"/>
-              <a:t> </a:t>
-            </a:r>
-            <a:r>
-              <a:rPr dirty="0" err="1"/>
-              <a:t>cerdas</a:t>
-            </a:r>
-            <a:r>
-              <a:rPr dirty="0"/>
-              <a:t> pada </a:t>
-            </a:r>
-            <a:r>
-              <a:rPr dirty="0" err="1"/>
-              <a:t>kamera</a:t>
-            </a:r>
-            <a:r>
-              <a:rPr dirty="0"/>
-              <a:t> RGB </a:t>
-            </a:r>
-            <a:r>
-              <a:rPr dirty="0" err="1"/>
-              <a:t>monokuler</a:t>
-            </a:r>
-            <a:r>
-              <a:rPr dirty="0"/>
-              <a:t> yang </a:t>
-            </a:r>
-            <a:r>
-              <a:rPr dirty="0" err="1"/>
-              <a:t>terjangkau</a:t>
-            </a:r>
-            <a:r>
-              <a:rPr dirty="0"/>
-              <a:t>.</a:t>
+              <a:t>•  Diperlukan solusi berbasis software visi komputer cerdas pada kamera RGB monokuler yang terjangkau.</a:t>
             </a:r>
           </a:p>
         </p:txBody>
@@ -5648,7 +4933,6 @@
           <a:lstStyle/>
           <a:p>
             <a:pPr algn="ctr"/>
-            <a:endParaRPr/>
           </a:p>
         </p:txBody>
       </p:sp>
@@ -5686,7 +4970,6 @@
               </a:defRPr>
             </a:pPr>
             <a:r>
-              <a:rPr dirty="0"/>
               <a:t>KEBUTUHAN OPERASIONAL</a:t>
             </a:r>
           </a:p>
@@ -5703,12 +4986,7 @@
               </a:defRPr>
             </a:pPr>
             <a:r>
-              <a:rPr dirty="0" err="1"/>
-              <a:t>Tuntutan</a:t>
-            </a:r>
-            <a:r>
-              <a:rPr dirty="0"/>
-              <a:t> Real-Time Edge</a:t>
+              <a:t>Tuntutan Real-Time Edge</a:t>
             </a:r>
           </a:p>
           <a:p>
@@ -5724,80 +5002,7 @@
               </a:defRPr>
             </a:pPr>
             <a:r>
-              <a:rPr dirty="0"/>
-              <a:t>•  </a:t>
-            </a:r>
-            <a:r>
-              <a:rPr dirty="0" err="1"/>
-              <a:t>Kendaraan</a:t>
-            </a:r>
-            <a:r>
-              <a:rPr dirty="0"/>
-              <a:t> </a:t>
-            </a:r>
-            <a:r>
-              <a:rPr dirty="0" err="1"/>
-              <a:t>melaju</a:t>
-            </a:r>
-            <a:r>
-              <a:rPr dirty="0"/>
-              <a:t> 40-60 km/jam </a:t>
-            </a:r>
-            <a:r>
-              <a:rPr dirty="0" err="1"/>
-              <a:t>membutuhkan</a:t>
-            </a:r>
-            <a:r>
-              <a:rPr dirty="0"/>
-              <a:t> </a:t>
-            </a:r>
-            <a:r>
-              <a:rPr dirty="0" err="1"/>
-              <a:t>respon</a:t>
-            </a:r>
-            <a:r>
-              <a:rPr dirty="0"/>
-              <a:t> </a:t>
-            </a:r>
-            <a:r>
-              <a:rPr dirty="0" err="1"/>
-              <a:t>deteksi</a:t>
-            </a:r>
-            <a:r>
-              <a:rPr dirty="0"/>
-              <a:t> </a:t>
-            </a:r>
-            <a:r>
-              <a:rPr dirty="0" err="1"/>
-              <a:t>dalam</a:t>
-            </a:r>
-            <a:r>
-              <a:rPr dirty="0"/>
-              <a:t> </a:t>
-            </a:r>
-            <a:r>
-              <a:rPr dirty="0" err="1"/>
-              <a:t>hitungan</a:t>
-            </a:r>
-            <a:r>
-              <a:rPr dirty="0"/>
-              <a:t> </a:t>
-            </a:r>
-            <a:r>
-              <a:rPr dirty="0" err="1"/>
-              <a:t>milidetik</a:t>
-            </a:r>
-            <a:r>
-              <a:rPr dirty="0"/>
-              <a:t> (&lt; 50 </a:t>
-            </a:r>
-            <a:r>
-              <a:rPr dirty="0" err="1"/>
-              <a:t>ms</a:t>
-            </a:r>
-            <a:r>
-              <a:rPr dirty="0"/>
-              <a:t>).</a:t>
+              <a:t>•  Kendaraan melaju 40-60 km/jam membutuhkan respon deteksi dalam hitungan milidetik (&lt; 50 ms).</a:t>
             </a:r>
           </a:p>
           <a:p>
@@ -5813,96 +5018,7 @@
               </a:defRPr>
             </a:pPr>
             <a:r>
-              <a:rPr dirty="0"/>
-              <a:t>•  </a:t>
-            </a:r>
-            <a:r>
-              <a:rPr dirty="0" err="1"/>
-              <a:t>Sistem</a:t>
-            </a:r>
-            <a:r>
-              <a:rPr dirty="0"/>
-              <a:t> </a:t>
-            </a:r>
-            <a:r>
-              <a:rPr dirty="0" err="1"/>
-              <a:t>harus</a:t>
-            </a:r>
-            <a:r>
-              <a:rPr dirty="0"/>
-              <a:t> </a:t>
-            </a:r>
-            <a:r>
-              <a:rPr dirty="0" err="1"/>
-              <a:t>mampu</a:t>
-            </a:r>
-            <a:r>
-              <a:rPr dirty="0"/>
-              <a:t> </a:t>
-            </a:r>
-            <a:r>
-              <a:rPr dirty="0" err="1"/>
-              <a:t>berjalan</a:t>
-            </a:r>
-            <a:r>
-              <a:rPr dirty="0"/>
-              <a:t> </a:t>
-            </a:r>
-            <a:r>
-              <a:rPr dirty="0" err="1"/>
-              <a:t>lancar</a:t>
-            </a:r>
-            <a:r>
-              <a:rPr dirty="0"/>
-              <a:t> pada </a:t>
-            </a:r>
-            <a:r>
-              <a:rPr dirty="0" err="1"/>
-              <a:t>perangkat</a:t>
-            </a:r>
-            <a:r>
-              <a:rPr dirty="0"/>
-              <a:t> </a:t>
-            </a:r>
-            <a:r>
-              <a:rPr dirty="0" err="1"/>
-              <a:t>komputasi</a:t>
-            </a:r>
-            <a:r>
-              <a:rPr dirty="0"/>
-              <a:t> onboard CPU </a:t>
-            </a:r>
-            <a:r>
-              <a:rPr dirty="0" err="1"/>
-              <a:t>standar</a:t>
-            </a:r>
-            <a:r>
-              <a:rPr dirty="0"/>
-              <a:t> </a:t>
-            </a:r>
-            <a:r>
-              <a:rPr dirty="0" err="1"/>
-              <a:t>tanpa</a:t>
-            </a:r>
-            <a:r>
-              <a:rPr dirty="0"/>
-              <a:t> </a:t>
-            </a:r>
-            <a:r>
-              <a:rPr dirty="0" err="1"/>
-              <a:t>latensi</a:t>
-            </a:r>
-            <a:r>
-              <a:rPr dirty="0"/>
-              <a:t> </a:t>
-            </a:r>
-            <a:r>
-              <a:rPr dirty="0" err="1"/>
-              <a:t>tinggi</a:t>
-            </a:r>
-            <a:r>
-              <a:rPr dirty="0"/>
-              <a:t>.</a:t>
+              <a:t>•  Sistem harus mampu berjalan lancar pada perangkat komputasi onboard CPU standar tanpa latensi tinggi.</a:t>
             </a:r>
           </a:p>
           <a:p>
@@ -5918,104 +5034,7 @@
               </a:defRPr>
             </a:pPr>
             <a:r>
-              <a:rPr dirty="0"/>
-              <a:t>•  </a:t>
-            </a:r>
-            <a:r>
-              <a:rPr dirty="0" err="1"/>
-              <a:t>Akurasi</a:t>
-            </a:r>
-            <a:r>
-              <a:rPr dirty="0"/>
-              <a:t> </a:t>
-            </a:r>
-            <a:r>
-              <a:rPr dirty="0" err="1"/>
-              <a:t>tinggi</a:t>
-            </a:r>
-            <a:r>
-              <a:rPr dirty="0"/>
-              <a:t> </a:t>
-            </a:r>
-            <a:r>
-              <a:rPr dirty="0" err="1"/>
-              <a:t>tidak</a:t>
-            </a:r>
-            <a:r>
-              <a:rPr dirty="0"/>
-              <a:t> </a:t>
-            </a:r>
-            <a:r>
-              <a:rPr dirty="0" err="1"/>
-              <a:t>ada</a:t>
-            </a:r>
-            <a:r>
-              <a:rPr dirty="0"/>
-              <a:t> </a:t>
-            </a:r>
-            <a:r>
-              <a:rPr dirty="0" err="1"/>
-              <a:t>artinya</a:t>
-            </a:r>
-            <a:r>
-              <a:rPr dirty="0"/>
-              <a:t> </a:t>
-            </a:r>
-            <a:r>
-              <a:rPr dirty="0" err="1"/>
-              <a:t>jika</a:t>
-            </a:r>
-            <a:r>
-              <a:rPr dirty="0"/>
-              <a:t> </a:t>
-            </a:r>
-            <a:r>
-              <a:rPr dirty="0" err="1"/>
-              <a:t>komputasi</a:t>
-            </a:r>
-            <a:r>
-              <a:rPr dirty="0"/>
-              <a:t> </a:t>
-            </a:r>
-            <a:r>
-              <a:rPr dirty="0" err="1"/>
-              <a:t>lambat</a:t>
-            </a:r>
-            <a:r>
-              <a:rPr dirty="0"/>
-              <a:t> dan </a:t>
-            </a:r>
-            <a:r>
-              <a:rPr dirty="0" err="1"/>
-              <a:t>tidak</a:t>
-            </a:r>
-            <a:r>
-              <a:rPr dirty="0"/>
-              <a:t> </a:t>
-            </a:r>
-            <a:r>
-              <a:rPr dirty="0" err="1"/>
-              <a:t>responsif</a:t>
-            </a:r>
-            <a:r>
-              <a:rPr dirty="0"/>
-              <a:t> di </a:t>
-            </a:r>
-            <a:r>
-              <a:rPr dirty="0" err="1"/>
-              <a:t>jalan</a:t>
-            </a:r>
-            <a:r>
-              <a:rPr dirty="0"/>
-              <a:t> </a:t>
-            </a:r>
-            <a:r>
-              <a:rPr dirty="0" err="1"/>
-              <a:t>raya</a:t>
-            </a:r>
-            <a:r>
-              <a:rPr dirty="0"/>
-              <a:t>.</a:t>
+              <a:t>•  Akurasi tinggi tidak ada artinya jika komputasi lambat dan tidak responsif di jalan raya.</a:t>
             </a:r>
           </a:p>
         </p:txBody>
@@ -6065,7 +5084,7 @@
 </file>
 
 <file path=ppt/slides/slide3.xml><?xml version="1.0" encoding="utf-8"?>
-<p:sld xmlns:a="http://schemas.openxmlformats.org/drawingml/2006/main" xmlns:r="http://schemas.openxmlformats.org/officeDocument/2006/relationships" xmlns:p="http://schemas.openxmlformats.org/presentationml/2006/main">
+<p:sld xmlns:a="http://schemas.openxmlformats.org/drawingml/2006/main" xmlns:p="http://schemas.openxmlformats.org/presentationml/2006/main" xmlns:r="http://schemas.openxmlformats.org/officeDocument/2006/relationships">
   <p:cSld>
     <p:bg>
       <p:bgPr>
@@ -6081,14 +5100,7 @@
         <p:cNvGrpSpPr/>
         <p:nvPr/>
       </p:nvGrpSpPr>
-      <p:grpSpPr>
-        <a:xfrm>
-          <a:off x="0" y="0"/>
-          <a:ext cx="0" cy="0"/>
-          <a:chOff x="0" y="0"/>
-          <a:chExt cx="0" cy="0"/>
-        </a:xfrm>
-      </p:grpSpPr>
+      <p:grpSpPr/>
       <p:sp>
         <p:nvSpPr>
           <p:cNvPr id="2" name="TextBox 1"/>
@@ -6239,7 +5251,6 @@
           <a:lstStyle/>
           <a:p>
             <a:pPr algn="ctr"/>
-            <a:endParaRPr/>
           </a:p>
         </p:txBody>
       </p:sp>
@@ -6388,7 +5399,6 @@
           <a:lstStyle/>
           <a:p>
             <a:pPr algn="ctr"/>
-            <a:endParaRPr/>
           </a:p>
         </p:txBody>
       </p:sp>
@@ -6537,7 +5547,6 @@
           <a:lstStyle/>
           <a:p>
             <a:pPr algn="ctr"/>
-            <a:endParaRPr/>
           </a:p>
         </p:txBody>
       </p:sp>
@@ -6686,7 +5695,6 @@
           <a:lstStyle/>
           <a:p>
             <a:pPr algn="ctr"/>
-            <a:endParaRPr/>
           </a:p>
         </p:txBody>
       </p:sp>
@@ -6819,7 +5827,7 @@
 </file>
 
 <file path=ppt/slides/slide4.xml><?xml version="1.0" encoding="utf-8"?>
-<p:sld xmlns:a="http://schemas.openxmlformats.org/drawingml/2006/main" xmlns:r="http://schemas.openxmlformats.org/officeDocument/2006/relationships" xmlns:p="http://schemas.openxmlformats.org/presentationml/2006/main">
+<p:sld xmlns:a="http://schemas.openxmlformats.org/drawingml/2006/main" xmlns:p="http://schemas.openxmlformats.org/presentationml/2006/main" xmlns:r="http://schemas.openxmlformats.org/officeDocument/2006/relationships">
   <p:cSld>
     <p:bg>
       <p:bgPr>
@@ -6835,14 +5843,7 @@
         <p:cNvGrpSpPr/>
         <p:nvPr/>
       </p:nvGrpSpPr>
-      <p:grpSpPr>
-        <a:xfrm>
-          <a:off x="0" y="0"/>
-          <a:ext cx="0" cy="0"/>
-          <a:chOff x="0" y="0"/>
-          <a:chExt cx="0" cy="0"/>
-        </a:xfrm>
-      </p:grpSpPr>
+      <p:grpSpPr/>
       <p:sp>
         <p:nvSpPr>
           <p:cNvPr id="2" name="TextBox 1"/>
@@ -6993,7 +5994,6 @@
           <a:lstStyle/>
           <a:p>
             <a:pPr algn="ctr"/>
-            <a:endParaRPr/>
           </a:p>
         </p:txBody>
       </p:sp>
@@ -7158,7 +6158,6 @@
           <a:lstStyle/>
           <a:p>
             <a:pPr algn="ctr"/>
-            <a:endParaRPr/>
           </a:p>
         </p:txBody>
       </p:sp>
@@ -7307,7 +6306,6 @@
           <a:lstStyle/>
           <a:p>
             <a:pPr algn="ctr"/>
-            <a:endParaRPr/>
           </a:p>
         </p:txBody>
       </p:sp>
@@ -7472,7 +6470,6 @@
           <a:lstStyle/>
           <a:p>
             <a:pPr algn="ctr"/>
-            <a:endParaRPr/>
           </a:p>
         </p:txBody>
       </p:sp>
@@ -7567,7 +6564,6 @@
           <a:lstStyle/>
           <a:p>
             <a:pPr algn="ctr"/>
-            <a:endParaRPr/>
           </a:p>
         </p:txBody>
       </p:sp>
@@ -7662,7 +6658,6 @@
           <a:lstStyle/>
           <a:p>
             <a:pPr algn="ctr"/>
-            <a:endParaRPr/>
           </a:p>
         </p:txBody>
       </p:sp>
@@ -7757,7 +6752,6 @@
           <a:lstStyle/>
           <a:p>
             <a:pPr algn="ctr"/>
-            <a:endParaRPr/>
           </a:p>
         </p:txBody>
       </p:sp>
@@ -7855,7 +6849,7 @@
 </file>
 
 <file path=ppt/slides/slide5.xml><?xml version="1.0" encoding="utf-8"?>
-<p:sld xmlns:a="http://schemas.openxmlformats.org/drawingml/2006/main" xmlns:r="http://schemas.openxmlformats.org/officeDocument/2006/relationships" xmlns:p="http://schemas.openxmlformats.org/presentationml/2006/main">
+<p:sld xmlns:a="http://schemas.openxmlformats.org/drawingml/2006/main" xmlns:p="http://schemas.openxmlformats.org/presentationml/2006/main" xmlns:r="http://schemas.openxmlformats.org/officeDocument/2006/relationships">
   <p:cSld>
     <p:bg>
       <p:bgPr>
@@ -7871,14 +6865,7 @@
         <p:cNvGrpSpPr/>
         <p:nvPr/>
       </p:nvGrpSpPr>
-      <p:grpSpPr>
-        <a:xfrm>
-          <a:off x="0" y="0"/>
-          <a:ext cx="0" cy="0"/>
-          <a:chOff x="0" y="0"/>
-          <a:chExt cx="0" cy="0"/>
-        </a:xfrm>
-      </p:grpSpPr>
+      <p:grpSpPr/>
       <p:sp>
         <p:nvSpPr>
           <p:cNvPr id="2" name="TextBox 1"/>
@@ -8029,7 +7016,6 @@
           <a:lstStyle/>
           <a:p>
             <a:pPr algn="ctr"/>
-            <a:endParaRPr/>
           </a:p>
         </p:txBody>
       </p:sp>
@@ -8306,7 +7292,6 @@
           <a:lstStyle/>
           <a:p>
             <a:pPr algn="ctr"/>
-            <a:endParaRPr/>
           </a:p>
         </p:txBody>
       </p:sp>
@@ -8554,7 +7539,7 @@
 </file>
 
 <file path=ppt/slides/slide6.xml><?xml version="1.0" encoding="utf-8"?>
-<p:sld xmlns:a="http://schemas.openxmlformats.org/drawingml/2006/main" xmlns:r="http://schemas.openxmlformats.org/officeDocument/2006/relationships" xmlns:p="http://schemas.openxmlformats.org/presentationml/2006/main">
+<p:sld xmlns:a="http://schemas.openxmlformats.org/drawingml/2006/main" xmlns:p="http://schemas.openxmlformats.org/presentationml/2006/main" xmlns:r="http://schemas.openxmlformats.org/officeDocument/2006/relationships">
   <p:cSld>
     <p:bg>
       <p:bgPr>
@@ -8570,14 +7555,7 @@
         <p:cNvGrpSpPr/>
         <p:nvPr/>
       </p:nvGrpSpPr>
-      <p:grpSpPr>
-        <a:xfrm>
-          <a:off x="0" y="0"/>
-          <a:ext cx="0" cy="0"/>
-          <a:chOff x="0" y="0"/>
-          <a:chExt cx="0" cy="0"/>
-        </a:xfrm>
-      </p:grpSpPr>
+      <p:grpSpPr/>
       <p:sp>
         <p:nvSpPr>
           <p:cNvPr id="2" name="TextBox 1"/>
@@ -8728,7 +7706,6 @@
           <a:lstStyle/>
           <a:p>
             <a:pPr algn="ctr"/>
-            <a:endParaRPr/>
           </a:p>
         </p:txBody>
       </p:sp>
@@ -9037,7 +8014,6 @@
           <a:lstStyle/>
           <a:p>
             <a:pPr algn="ctr"/>
-            <a:endParaRPr/>
           </a:p>
         </p:txBody>
       </p:sp>
@@ -9146,7 +8122,7 @@
 </file>
 
 <file path=ppt/slides/slide7.xml><?xml version="1.0" encoding="utf-8"?>
-<p:sld xmlns:a="http://schemas.openxmlformats.org/drawingml/2006/main" xmlns:r="http://schemas.openxmlformats.org/officeDocument/2006/relationships" xmlns:p="http://schemas.openxmlformats.org/presentationml/2006/main">
+<p:sld xmlns:a="http://schemas.openxmlformats.org/drawingml/2006/main" xmlns:p="http://schemas.openxmlformats.org/presentationml/2006/main" xmlns:r="http://schemas.openxmlformats.org/officeDocument/2006/relationships">
   <p:cSld>
     <p:bg>
       <p:bgPr>
@@ -9162,14 +8138,7 @@
         <p:cNvGrpSpPr/>
         <p:nvPr/>
       </p:nvGrpSpPr>
-      <p:grpSpPr>
-        <a:xfrm>
-          <a:off x="0" y="0"/>
-          <a:ext cx="0" cy="0"/>
-          <a:chOff x="0" y="0"/>
-          <a:chExt cx="0" cy="0"/>
-        </a:xfrm>
-      </p:grpSpPr>
+      <p:grpSpPr/>
       <p:sp>
         <p:nvSpPr>
           <p:cNvPr id="2" name="TextBox 1"/>
@@ -9320,7 +8289,6 @@
           <a:lstStyle/>
           <a:p>
             <a:pPr algn="ctr"/>
-            <a:endParaRPr/>
           </a:p>
         </p:txBody>
       </p:sp>
@@ -9469,7 +8437,6 @@
           <a:lstStyle/>
           <a:p>
             <a:pPr algn="ctr"/>
-            <a:endParaRPr/>
           </a:p>
         </p:txBody>
       </p:sp>
@@ -9618,7 +8585,6 @@
           <a:lstStyle/>
           <a:p>
             <a:pPr algn="ctr"/>
-            <a:endParaRPr/>
           </a:p>
         </p:txBody>
       </p:sp>
@@ -9767,7 +8733,6 @@
           <a:lstStyle/>
           <a:p>
             <a:pPr algn="ctr"/>
-            <a:endParaRPr/>
           </a:p>
         </p:txBody>
       </p:sp>
@@ -9919,7 +8884,7 @@
 </file>
 
 <file path=ppt/slides/slide8.xml><?xml version="1.0" encoding="utf-8"?>
-<p:sld xmlns:a="http://schemas.openxmlformats.org/drawingml/2006/main" xmlns:r="http://schemas.openxmlformats.org/officeDocument/2006/relationships" xmlns:p="http://schemas.openxmlformats.org/presentationml/2006/main">
+<p:sld xmlns:a="http://schemas.openxmlformats.org/drawingml/2006/main" xmlns:p="http://schemas.openxmlformats.org/presentationml/2006/main" xmlns:r="http://schemas.openxmlformats.org/officeDocument/2006/relationships">
   <p:cSld>
     <p:bg>
       <p:bgPr>
@@ -9935,14 +8900,7 @@
         <p:cNvGrpSpPr/>
         <p:nvPr/>
       </p:nvGrpSpPr>
-      <p:grpSpPr>
-        <a:xfrm>
-          <a:off x="0" y="0"/>
-          <a:ext cx="0" cy="0"/>
-          <a:chOff x="0" y="0"/>
-          <a:chExt cx="0" cy="0"/>
-        </a:xfrm>
-      </p:grpSpPr>
+      <p:grpSpPr/>
       <p:sp>
         <p:nvSpPr>
           <p:cNvPr id="2" name="TextBox 1"/>
@@ -10093,7 +9051,6 @@
           <a:lstStyle/>
           <a:p>
             <a:pPr algn="ctr"/>
-            <a:endParaRPr/>
           </a:p>
         </p:txBody>
       </p:sp>
@@ -10242,7 +9199,6 @@
           <a:lstStyle/>
           <a:p>
             <a:pPr algn="ctr"/>
-            <a:endParaRPr/>
           </a:p>
         </p:txBody>
       </p:sp>
@@ -10407,7 +9363,6 @@
           <a:lstStyle/>
           <a:p>
             <a:pPr algn="ctr"/>
-            <a:endParaRPr/>
           </a:p>
         </p:txBody>
       </p:sp>
@@ -10556,7 +9511,6 @@
           <a:lstStyle/>
           <a:p>
             <a:pPr algn="ctr"/>
-            <a:endParaRPr/>
           </a:p>
         </p:txBody>
       </p:sp>
@@ -10651,7 +9605,6 @@
           <a:lstStyle/>
           <a:p>
             <a:pPr algn="ctr"/>
-            <a:endParaRPr/>
           </a:p>
         </p:txBody>
       </p:sp>
@@ -10746,7 +9699,6 @@
           <a:lstStyle/>
           <a:p>
             <a:pPr algn="ctr"/>
-            <a:endParaRPr/>
           </a:p>
         </p:txBody>
       </p:sp>
@@ -10844,7 +9796,7 @@
 </file>
 
 <file path=ppt/slides/slide9.xml><?xml version="1.0" encoding="utf-8"?>
-<p:sld xmlns:a="http://schemas.openxmlformats.org/drawingml/2006/main" xmlns:r="http://schemas.openxmlformats.org/officeDocument/2006/relationships" xmlns:p="http://schemas.openxmlformats.org/presentationml/2006/main">
+<p:sld xmlns:a="http://schemas.openxmlformats.org/drawingml/2006/main" xmlns:p="http://schemas.openxmlformats.org/presentationml/2006/main" xmlns:r="http://schemas.openxmlformats.org/officeDocument/2006/relationships">
   <p:cSld>
     <p:bg>
       <p:bgPr>
@@ -10860,14 +9812,7 @@
         <p:cNvGrpSpPr/>
         <p:nvPr/>
       </p:nvGrpSpPr>
-      <p:grpSpPr>
-        <a:xfrm>
-          <a:off x="0" y="0"/>
-          <a:ext cx="0" cy="0"/>
-          <a:chOff x="0" y="0"/>
-          <a:chExt cx="0" cy="0"/>
-        </a:xfrm>
-      </p:grpSpPr>
+      <p:grpSpPr/>
       <p:sp>
         <p:nvSpPr>
           <p:cNvPr id="2" name="TextBox 1"/>
@@ -11018,7 +9963,6 @@
           <a:lstStyle/>
           <a:p>
             <a:pPr algn="ctr"/>
-            <a:endParaRPr/>
           </a:p>
         </p:txBody>
       </p:sp>
@@ -11072,7 +10016,7 @@
               </a:defRPr>
             </a:pPr>
             <a:r>
-              <a:t>Krisantus Linardi</a:t>
+              <a:t>Krisantus Amka Ginting  &amp;  Linardi Halim</a:t>
             </a:r>
           </a:p>
           <a:p>
@@ -11088,7 +10032,7 @@
               </a:defRPr>
             </a:pPr>
             <a:r>
-              <a:t>•  Lead Data Strategy &amp; Preprocessing Pipeline</a:t>
+              <a:t>•  Data Strategy, Preprocessing &amp; Documentation</a:t>
             </a:r>
           </a:p>
           <a:p>
@@ -11136,7 +10080,7 @@
               </a:defRPr>
             </a:pPr>
             <a:r>
-              <a:t>•    • Implementasi modul penajaman citra adaptif (CLAHE kanal-L &amp; Gamma).</a:t>
+              <a:t>•    • Implementasi modul pencerahan citra adaptif (CLAHE kanal-L &amp; Gamma).</a:t>
             </a:r>
           </a:p>
           <a:p>
@@ -11152,7 +10096,7 @@
               </a:defRPr>
             </a:pPr>
             <a:r>
-              <a:t>•    • Validasi pemisahan dataset dan pencegahan data leakage.</a:t>
+              <a:t>•    • Penyusunan proposal, laporan teknis, dan rekap tracker/logbook.</a:t>
             </a:r>
           </a:p>
         </p:txBody>
@@ -11199,7 +10143,6 @@
           <a:lstStyle/>
           <a:p>
             <a:pPr algn="ctr"/>
-            <a:endParaRPr/>
           </a:p>
         </p:txBody>
       </p:sp>
@@ -11253,7 +10196,7 @@
               </a:defRPr>
             </a:pPr>
             <a:r>
-              <a:t>Kristofer Leonard</a:t>
+              <a:t>Kristofer Ryan Giggs Eka Saputra  &amp;  Leonard Franscois</a:t>
             </a:r>
           </a:p>
           <a:p>
@@ -11269,7 +10212,7 @@
               </a:defRPr>
             </a:pPr>
             <a:r>
-              <a:t>•  Lead Model Architecture &amp; Inference Deployment</a:t>
+              <a:t>•  Model Architecture, Training &amp; Deployment</a:t>
             </a:r>
           </a:p>
           <a:p>
@@ -11333,7 +10276,7 @@
               </a:defRPr>
             </a:pPr>
             <a:r>
-              <a:t>•    • Benchmarking FPS &amp; pembangunan prototype aplikasi demo inferensi.</a:t>
+              <a:t>•    • Benchmarking FPS, prototype demo inferensi, dan video cadangan.</a:t>
             </a:r>
           </a:p>
         </p:txBody>
@@ -11380,7 +10323,6 @@
           <a:lstStyle/>
           <a:p>
             <a:pPr algn="ctr"/>
-            <a:endParaRPr/>
           </a:p>
         </p:txBody>
       </p:sp>
